--- a/outputs/NILM_scientific_poster_revised.pptx
+++ b/outputs/NILM_scientific_poster_revised.pptx
@@ -2,13 +2,13 @@
 <file path=ppt/presentation.xml><?xml version="1.0" encoding="utf-8"?>
 <p:presentation xmlns:p="http://schemas.openxmlformats.org/presentationml/2006/main">
   <p:sldMasterIdLst>
-    <p:sldMasterId xmlns:r="http://schemas.openxmlformats.org/officeDocument/2006/relationships" id="2147483648" r:id="R7c35a3fff3d54824"/>
+    <p:sldMasterId xmlns:r="http://schemas.openxmlformats.org/officeDocument/2006/relationships" id="2147483648" r:id="R02fc15f870304e30"/>
   </p:sldMasterIdLst>
   <p:notesMasterIdLst>
-    <p:notesMasterId xmlns:r="http://schemas.openxmlformats.org/officeDocument/2006/relationships" r:id="R829f5c51cb3f40f3"/>
+    <p:notesMasterId xmlns:r="http://schemas.openxmlformats.org/officeDocument/2006/relationships" r:id="Rad58833cd82945a9"/>
   </p:notesMasterIdLst>
   <p:sldIdLst>
-    <p:sldId xmlns:r="http://schemas.openxmlformats.org/officeDocument/2006/relationships" id="256" r:id="Rc4e35b5902e94cb0"/>
+    <p:sldId xmlns:r="http://schemas.openxmlformats.org/officeDocument/2006/relationships" id="256" r:id="R85e761fbf721438b"/>
   </p:sldIdLst>
   <p:sldSz cx="30279975" cy="42808493"/>
   <p:notesSz cx="6858000" cy="9144000"/>
@@ -601,7 +601,7 @@
   </p:cSld>
   <p:clrMap bg1="lt1" tx1="dk1" bg2="lt2" tx2="dk2" accent1="accent1" accent2="accent2" accent3="accent3" accent4="accent4" accent5="accent5" accent6="accent6" hlink="hlink" folHlink="folHlink"/>
   <p:sldLayoutIdLst>
-    <p:sldLayoutId xmlns:r="http://schemas.openxmlformats.org/officeDocument/2006/relationships" id="2147483649" r:id="R6609d0b01add4aee"/>
+    <p:sldLayoutId xmlns:r="http://schemas.openxmlformats.org/officeDocument/2006/relationships" id="2147483649" r:id="R74a95d2a985a4ac0"/>
   </p:sldLayoutIdLst>
   <p:txStyles>
     <p:titleStyle>
@@ -1469,7 +1469,7 @@
                 <a:ea typeface="Arial"/>
                 <a:cs typeface="Arial"/>
               </a:rPr>
-              <a:t>A complete laboratory NILM workflow: physics-aware aggregation, one PAC4200 meter, synthetic and measured ground truth, a deployable Random Forest mix model, residual-aware live inference, and training-on-the-go for unknown devices.</a:t>
+              <a:t>A complete laboratory NILM workflow: PAC4200 acquisition, HDF5 ground-truth scenarios, physics-aware PCC aggregation, a deployable Random Forest presence/power mix model, residual-aware live inference, and guided retraining for unknown devices.</a:t>
             </a:r>
           </a:p>
         </p:txBody>
@@ -1533,7 +1533,7 @@
       </p:sp>
       <p:cxnSp>
         <p:nvCxnSpPr>
-          <p:cNvPr id="213" name=""/>
+          <p:cNvPr id="893" name=""/>
           <p:cNvCxnSpPr/>
           <p:nvPr/>
         </p:nvCxnSpPr>
@@ -2002,7 +2002,7 @@
       </p:sp>
       <p:cxnSp>
         <p:nvCxnSpPr>
-          <p:cNvPr id="221" name=""/>
+          <p:cNvPr id="901" name=""/>
           <p:cNvCxnSpPr/>
           <p:nvPr/>
         </p:nvCxnSpPr>
@@ -2024,7 +2024,7 @@
       </p:cxnSp>
       <p:cxnSp>
         <p:nvCxnSpPr>
-          <p:cNvPr id="222" name=""/>
+          <p:cNvPr id="902" name=""/>
           <p:cNvCxnSpPr/>
           <p:nvPr/>
         </p:nvCxnSpPr>
@@ -2160,7 +2160,7 @@
       </p:sp>
       <p:cxnSp>
         <p:nvCxnSpPr>
-          <p:cNvPr id="225" name=""/>
+          <p:cNvPr id="905" name=""/>
           <p:cNvCxnSpPr/>
           <p:nvPr/>
         </p:nvCxnSpPr>
@@ -2197,7 +2197,7 @@
         <p:spPr>
           <a:xfrm xmlns:a="http://schemas.openxmlformats.org/drawingml/2006/main">
             <a:off x="1428750" y="14859000"/>
-            <a:ext cx="8763000" cy="5334000"/>
+            <a:ext cx="8763000" cy="8286750"/>
           </a:xfrm>
           <a:prstGeom xmlns:a="http://schemas.openxmlformats.org/drawingml/2006/main" prst="rect">
             <a:avLst/>
@@ -2232,7 +2232,7 @@
                 <a:ea typeface="Arial"/>
                 <a:cs typeface="Arial"/>
               </a:rPr>
-              <a:t>Synthetic generator: fridge, resistive load, hair dryer, PC, washing machine, EV charging, PV, synchronous machine and baseload; exact per-sample ground truth.</a:t>
+              <a:t>All sources are normalized to one HDF5 layout: UTC microsecond timestamps, float32 measurement channels, metadata and optional ground truth, LZF-compressed for long recordings.</a:t>
             </a:r>
           </a:p>
           <a:p xmlns:a="http://schemas.openxmlformats.org/drawingml/2006/main">
@@ -2256,7 +2256,7 @@
                 <a:ea typeface="Arial"/>
                 <a:cs typeface="Arial"/>
               </a:rPr>
-              <a:t>Aggregator: builds the PCC signal by phase-wise P/Q summation, signed PV power and complex vector summation of harmonic currents, so cancellation and reinforcement remain representable.</a:t>
+              <a:t>Synthetic traces provide exact per-sample P/Q/state labels; measured PAC4200 single-device recordings provide real signatures; the mixer loops measured recordings into labelled multi-device scenarios.</a:t>
             </a:r>
           </a:p>
           <a:p xmlns:a="http://schemas.openxmlformats.org/drawingml/2006/main">
@@ -2280,7 +2280,7 @@
                 <a:ea typeface="Arial"/>
                 <a:cs typeface="Arial"/>
               </a:rPr>
-              <a:t>Measured scenario mixer: loops isolated PAC4200 recordings with random ON/OFF schedules into labelled multi-device mixes, preserving real signatures while keeping ground truth.</a:t>
+              <a:t>The aggregator forms the PCC signal physically: single-phase loads land on L1-L3, balanced devices are split, signed PV can drive net P below zero, and totals P/Q/S/PF/THD are recomputed.</a:t>
             </a:r>
           </a:p>
           <a:p xmlns:a="http://schemas.openxmlformats.org/drawingml/2006/main">
@@ -2304,27 +2304,51 @@
                 <a:ea typeface="Arial"/>
                 <a:cs typeface="Arial"/>
               </a:rPr>
-              <a:t>Common pipeline: HDF5 storage, preprocessing, feature extraction, training and live inference use the same source-agnostic path.</a:t>
+              <a:t>Current harmonics are summed as complex vectors per phase for orders 2..40, then stored as magnitude/phase; this preserves cancellation/reinforcement that magnitude addition would destroy.</a:t>
+            </a:r>
+          </a:p>
+          <a:p xmlns:a="http://schemas.openxmlformats.org/drawingml/2006/main">
+            <a:pPr algn="l">
+              <a:buNone/>
+              <a:defRPr sz="2475" b="0" i="0">
+                <a:solidFill>
+                  <a:srgbClr val="000000"/>
+                </a:solidFill>
+                <a:latin typeface="Arial"/>
+                <a:ea typeface="Arial"/>
+                <a:cs typeface="Arial"/>
+              </a:defRPr>
+            </a:pPr>
+            <a:r>
+              <a:rPr sz="2475" b="0" i="0">
+                <a:solidFill>
+                  <a:srgbClr val="000000"/>
+                </a:solidFill>
+                <a:latin typeface="Arial"/>
+                <a:ea typeface="Arial"/>
+                <a:cs typeface="Arial"/>
+              </a:rPr>
+              <a:t>Real PAC4200 harmonics come from Modbus FC 0x14 file records (L1 current file 113 verified); real harmonic phases are unavailable and marked as such.</a:t>
             </a:r>
           </a:p>
         </p:txBody>
       </p:sp>
       <p:pic>
         <p:nvPicPr>
-          <p:cNvPr id="227" name=""/>
+          <p:cNvPr id="907" name=""/>
           <p:cNvPicPr>
             <a:picLocks xmlns:a="http://schemas.openxmlformats.org/drawingml/2006/main" noChangeAspect="1"/>
           </p:cNvPicPr>
           <p:nvPr/>
         </p:nvPicPr>
         <p:blipFill>
-          <a:blip xmlns:r="http://schemas.openxmlformats.org/officeDocument/2006/relationships" xmlns:a="http://schemas.openxmlformats.org/drawingml/2006/main" r:embed="Re707d1dd2ec8463c"/>
+          <a:blip xmlns:r="http://schemas.openxmlformats.org/officeDocument/2006/relationships" xmlns:a="http://schemas.openxmlformats.org/drawingml/2006/main" r:embed="Raad149e5aebe49a2"/>
           <a:stretch xmlns:a="http://schemas.openxmlformats.org/drawingml/2006/main"/>
         </p:blipFill>
         <p:spPr>
           <a:xfrm xmlns:a="http://schemas.openxmlformats.org/drawingml/2006/main">
-            <a:off x="1604323" y="20650200"/>
-            <a:ext cx="8411854" cy="5810250"/>
+            <a:off x="1428750" y="23907750"/>
+            <a:ext cx="8763000" cy="4953000"/>
           </a:xfrm>
           <a:prstGeom xmlns:a="http://schemas.openxmlformats.org/drawingml/2006/main" prst="rect">
             <a:avLst/>
@@ -2347,7 +2371,7 @@
         </p:nvSpPr>
         <p:spPr>
           <a:xfrm xmlns:a="http://schemas.openxmlformats.org/drawingml/2006/main">
-            <a:off x="1428750" y="26650950"/>
+            <a:off x="1428750" y="29003625"/>
             <a:ext cx="8763000" cy="742950"/>
           </a:xfrm>
           <a:prstGeom xmlns:a="http://schemas.openxmlformats.org/drawingml/2006/main" prst="rect">
@@ -2447,7 +2471,7 @@
       </p:sp>
       <p:cxnSp>
         <p:nvCxnSpPr>
-          <p:cNvPr id="230" name=""/>
+          <p:cNvPr id="910" name=""/>
           <p:cNvCxnSpPr/>
           <p:nvPr/>
         </p:nvCxnSpPr>
@@ -2469,14 +2493,14 @@
       </p:cxnSp>
       <p:pic>
         <p:nvPicPr>
-          <p:cNvPr id="231" name=""/>
+          <p:cNvPr id="911" name=""/>
           <p:cNvPicPr>
             <a:picLocks xmlns:a="http://schemas.openxmlformats.org/drawingml/2006/main" noChangeAspect="1"/>
           </p:cNvPicPr>
           <p:nvPr/>
         </p:nvPicPr>
         <p:blipFill>
-          <a:blip xmlns:r="http://schemas.openxmlformats.org/officeDocument/2006/relationships" xmlns:a="http://schemas.openxmlformats.org/drawingml/2006/main" r:embed="R96532027de1e4720"/>
+          <a:blip xmlns:r="http://schemas.openxmlformats.org/officeDocument/2006/relationships" xmlns:a="http://schemas.openxmlformats.org/drawingml/2006/main" r:embed="R37239d7819d7415a"/>
           <a:srcRect xmlns:a="http://schemas.openxmlformats.org/drawingml/2006/main" l="0" t="1295" r="0" b="1295"/>
           <a:stretch xmlns:a="http://schemas.openxmlformats.org/drawingml/2006/main">
             <a:fillRect l="0" t="0" r="0" b="0"/>
@@ -2679,8 +2703,8 @@
         </p:nvSpPr>
         <p:spPr>
           <a:xfrm xmlns:a="http://schemas.openxmlformats.org/drawingml/2006/main">
-            <a:off x="10668000" y="15068550"/>
-            <a:ext cx="8763000" cy="5048250"/>
+            <a:off x="10668000" y="15049500"/>
+            <a:ext cx="8763000" cy="5191125"/>
           </a:xfrm>
           <a:prstGeom xmlns:a="http://schemas.openxmlformats.org/drawingml/2006/main" prst="rect">
             <a:avLst/>
@@ -2715,7 +2739,7 @@
                 <a:ea typeface="Arial"/>
                 <a:cs typeface="Arial"/>
               </a:rPr>
-              <a:t>The mix model has two linked tasks in each 10 s aggregate window: presence detection decides which of the seven device families are ON, and power regression estimates watts for the active labels.</a:t>
+              <a:t>The mix model answers two questions per 10 s aggregate window: which appliances are ON and how many watts each one contributes.</a:t>
             </a:r>
           </a:p>
           <a:p xmlns:a="http://schemas.openxmlformats.org/drawingml/2006/main">
@@ -2739,7 +2763,7 @@
                 <a:ea typeface="Arial"/>
                 <a:cs typeface="Arial"/>
               </a:rPr>
-              <a:t>Presence gates the power output, so a device contributes to the stacked estimate only when the classifier marks it active; this keeps small residuals visible instead of spreading them across known loads.</a:t>
+              <a:t>Presence is a MultiOutput RandomForestClassifier; power is a MultiOutputRegressor with one RF regressor per appliance family.</a:t>
             </a:r>
           </a:p>
           <a:p xmlns:a="http://schemas.openxmlformats.org/drawingml/2006/main">
@@ -2763,7 +2787,7 @@
                 <a:ea typeface="Arial"/>
                 <a:cs typeface="Arial"/>
               </a:rPr>
-              <a:t>The RF uses tabular physical features: P/Q/S statistics, Q/P, PF, THD_I, L1-L3 active power, file-relative hour and settled P/Q edge features.</a:t>
+              <a:t>At inference, presence gates watts (OFF -&gt; 0 W), so the dashboard reports plausible device power and leaves the rest as residual.</a:t>
             </a:r>
           </a:p>
           <a:p xmlns:a="http://schemas.openxmlformats.org/drawingml/2006/main">
@@ -2787,7 +2811,31 @@
                 <a:ea typeface="Arial"/>
                 <a:cs typeface="Arial"/>
               </a:rPr>
-              <a:t>Why RF: robust on small measured datasets, fast enough for teach-loop retraining, and transparent enough to debug feature behavior, device vocabulary and model metrics.</a:t>
+              <a:t>Its 17 features combine steady-state power, phase split, harmonics, context and event cues; the bundle stores the exact feature contract for live slicing.</a:t>
+            </a:r>
+          </a:p>
+          <a:p xmlns:a="http://schemas.openxmlformats.org/drawingml/2006/main">
+            <a:pPr algn="l">
+              <a:buNone/>
+              <a:defRPr sz="2325" b="0" i="0">
+                <a:solidFill>
+                  <a:srgbClr val="000000"/>
+                </a:solidFill>
+                <a:latin typeface="Arial"/>
+                <a:ea typeface="Arial"/>
+                <a:cs typeface="Arial"/>
+              </a:defRPr>
+            </a:pPr>
+            <a:r>
+              <a:rPr sz="2325" b="0" i="0">
+                <a:solidFill>
+                  <a:srgbClr val="000000"/>
+                </a:solidFill>
+                <a:latin typeface="Arial"/>
+                <a:ea typeface="Arial"/>
+                <a:cs typeface="Arial"/>
+              </a:rPr>
+              <a:t>Why RF: robust on small measured datasets, fast enough for teach-loop retraining, and transparent enough to debug features, vocabulary and metrics.</a:t>
             </a:r>
           </a:p>
         </p:txBody>
@@ -2808,7 +2856,7 @@
         </p:nvSpPr>
         <p:spPr>
           <a:xfrm xmlns:a="http://schemas.openxmlformats.org/drawingml/2006/main">
-            <a:off x="10668000" y="20878800"/>
+            <a:off x="10668000" y="25527000"/>
             <a:ext cx="8763000" cy="666750"/>
           </a:xfrm>
           <a:prstGeom xmlns:a="http://schemas.openxmlformats.org/drawingml/2006/main" prst="rect">
@@ -2865,8 +2913,8 @@
         </p:nvSpPr>
         <p:spPr>
           <a:xfrm xmlns:a="http://schemas.openxmlformats.org/drawingml/2006/main">
-            <a:off x="10668000" y="21564600"/>
-            <a:ext cx="8763000" cy="4095750"/>
+            <a:off x="10668000" y="26212800"/>
+            <a:ext cx="8763000" cy="3667125"/>
           </a:xfrm>
           <a:prstGeom xmlns:a="http://schemas.openxmlformats.org/drawingml/2006/main" prst="rect">
             <a:avLst/>
@@ -2901,7 +2949,7 @@
                 <a:ea typeface="Arial"/>
                 <a:cs typeface="Arial"/>
               </a:rPr>
-              <a:t>The live engine scans recent P/Q samples and compares settled medians before and after the strongest jump.</a:t>
+              <a:t>Edges are computed from raw live P/Q samples before the 10 s RF window has fully settled.</a:t>
             </a:r>
           </a:p>
           <a:p xmlns:a="http://schemas.openxmlformats.org/drawingml/2006/main">
@@ -2925,7 +2973,7 @@
                 <a:ea typeface="Arial"/>
                 <a:cs typeface="Arial"/>
               </a:rPr>
-              <a:t>Edges count only above thresholds (about 8 W or 16 var), after quiet-state checks and a debounce interval.</a:t>
+              <a:t>Using the last 8 s, the detector compares settled pre/post medians, rejects noisy states and emits dP, dQ and timestamp.</a:t>
             </a:r>
           </a:p>
           <a:p xmlns:a="http://schemas.openxmlformats.org/drawingml/2006/main">
@@ -2949,7 +2997,7 @@
                 <a:ea typeface="Arial"/>
                 <a:cs typeface="Arial"/>
               </a:rPr>
-              <a:t>Matched edges claim devices ON/OFF with timestamps; the RF window model supplies the steady-state presence and power estimate.</a:t>
+              <a:t>A matched ON edge claims the device with its own watt step; a matched OFF edge releases it, so the UI reacts immediately.</a:t>
             </a:r>
           </a:p>
           <a:p xmlns:a="http://schemas.openxmlformats.org/drawingml/2006/main">
@@ -2973,7 +3021,7 @@
                 <a:ea typeface="Arial"/>
                 <a:cs typeface="Arial"/>
               </a:rPr>
-              <a:t>Residual power is deliberately left visible. Sustained unexplained power triggers the unknown-device teaching workflow instead of forcing a wrong known label.</a:t>
+              <a:t>RF presence probabilities are median-smoothed and passed through hysteresis (about 0.55 ON / 0.45 OFF); final state merges RF predictions, edge claims and residual power.</a:t>
             </a:r>
           </a:p>
         </p:txBody>
@@ -2994,7 +3042,7 @@
         </p:nvSpPr>
         <p:spPr>
           <a:xfrm xmlns:a="http://schemas.openxmlformats.org/drawingml/2006/main">
-            <a:off x="10668000" y="25860375"/>
+            <a:off x="10668000" y="20859750"/>
             <a:ext cx="8763000" cy="666750"/>
           </a:xfrm>
           <a:prstGeom xmlns:a="http://schemas.openxmlformats.org/drawingml/2006/main" prst="rect">
@@ -3051,8 +3099,8 @@
         </p:nvSpPr>
         <p:spPr>
           <a:xfrm xmlns:a="http://schemas.openxmlformats.org/drawingml/2006/main">
-            <a:off x="10668000" y="26574750"/>
-            <a:ext cx="8763000" cy="4095750"/>
+            <a:off x="10668000" y="21545550"/>
+            <a:ext cx="8763000" cy="3000375"/>
           </a:xfrm>
           <a:prstGeom xmlns:a="http://schemas.openxmlformats.org/drawingml/2006/main" prst="rect">
             <a:avLst/>
@@ -3087,7 +3135,7 @@
                 <a:ea typeface="Arial"/>
                 <a:cs typeface="Arial"/>
               </a:rPr>
-              <a:t>1. Unknown residual appears in the live dashboard.</a:t>
+              <a:t>Residual monitor flags unexplained power above max(30 W, 15% of total) for 8 s.</a:t>
             </a:r>
           </a:p>
           <a:p xmlns:a="http://schemas.openxmlformats.org/drawingml/2006/main">
@@ -3111,7 +3159,7 @@
                 <a:ea typeface="Arial"/>
                 <a:cs typeface="Arial"/>
               </a:rPr>
-              <a:t>2. User names the device and records an isolated OFF-ON-OFF sequence.</a:t>
+              <a:t>The UI then asks for a device name and records OFF baseline, isolated ON operation and OFF tail, giving the new label one clean signature.</a:t>
             </a:r>
           </a:p>
           <a:p xmlns:a="http://schemas.openxmlformats.org/drawingml/2006/main">
@@ -3135,7 +3183,7 @@
                 <a:ea typeface="Arial"/>
                 <a:cs typeface="Arial"/>
               </a:rPr>
-              <a:t>3. Measured scenarios are rebuilt automatically.</a:t>
+              <a:t>Measured scenarios are rebuilt; mix and identify bundles retrain in the background, then the live engine hot-reloads the bundle.</a:t>
             </a:r>
           </a:p>
           <a:p xmlns:a="http://schemas.openxmlformats.org/drawingml/2006/main">
@@ -3159,31 +3207,7 @@
                 <a:ea typeface="Arial"/>
                 <a:cs typeface="Arial"/>
               </a:rPr>
-              <a:t>4. Mix and identify models retrain in the background and hot-reload.</a:t>
-            </a:r>
-          </a:p>
-          <a:p xmlns:a="http://schemas.openxmlformats.org/drawingml/2006/main">
-            <a:pPr algn="l">
-              <a:buNone/>
-              <a:defRPr sz="2475" b="0" i="0">
-                <a:solidFill>
-                  <a:srgbClr val="000000"/>
-                </a:solidFill>
-                <a:latin typeface="Arial"/>
-                <a:ea typeface="Arial"/>
-                <a:cs typeface="Arial"/>
-              </a:defRPr>
-            </a:pPr>
-            <a:r>
-              <a:rPr sz="2475" b="0" i="0">
-                <a:solidFill>
-                  <a:srgbClr val="000000"/>
-                </a:solidFill>
-                <a:latin typeface="Arial"/>
-                <a:ea typeface="Arial"/>
-                <a:cs typeface="Arial"/>
-              </a:rPr>
-              <a:t>5. New device vocabulary is stored in the model bundle; no code change is required.</a:t>
+              <a:t>Stored feature lists preserve compatibility with older model bundles.</a:t>
             </a:r>
           </a:p>
         </p:txBody>
@@ -3247,7 +3271,7 @@
       </p:sp>
       <p:cxnSp>
         <p:nvCxnSpPr>
-          <p:cNvPr id="241" name=""/>
+          <p:cNvPr id="921" name=""/>
           <p:cNvCxnSpPr/>
           <p:nvPr/>
         </p:nvCxnSpPr>
@@ -4210,7 +4234,7 @@
         </p:nvSpPr>
         <p:spPr>
           <a:xfrm xmlns:a="http://schemas.openxmlformats.org/drawingml/2006/main">
-            <a:off x="19907250" y="20050125"/>
+            <a:off x="19907250" y="20955000"/>
             <a:ext cx="8763000" cy="571500"/>
           </a:xfrm>
           <a:prstGeom xmlns:a="http://schemas.openxmlformats.org/drawingml/2006/main" prst="rect">
@@ -4320,7 +4344,7 @@
         <p:spPr>
           <a:xfrm xmlns:a="http://schemas.openxmlformats.org/drawingml/2006/main">
             <a:off x="19907250" y="10306050"/>
-            <a:ext cx="8763000" cy="4191000"/>
+            <a:ext cx="8763000" cy="4286250"/>
           </a:xfrm>
           <a:prstGeom xmlns:a="http://schemas.openxmlformats.org/drawingml/2006/main" prst="rect">
             <a:avLst/>
@@ -4369,7 +4393,7 @@
                 <a:ea typeface="Aptos"/>
                 <a:cs typeface="Aptos"/>
               </a:rPr>
-              <a:t>The RF mix model is the central deployable model: it stores feature list, device vocabulary, metrics and presence-gated power logic.</a:t>
+              <a:t>The central technical pair is aggregator + RF mix model: the aggregator creates a physically meaningful PCC view with ground truth; the RF bundle maps 17 aggregate features to presence and watts.</a:t>
             </a:r>
           </a:p>
           <a:p xmlns:a="http://schemas.openxmlformats.org/drawingml/2006/main">
@@ -4428,7 +4452,7 @@
         </p:nvSpPr>
         <p:spPr>
           <a:xfrm xmlns:a="http://schemas.openxmlformats.org/drawingml/2006/main">
-            <a:off x="19907250" y="21288375"/>
+            <a:off x="19907250" y="22193250"/>
             <a:ext cx="8763000" cy="666750"/>
           </a:xfrm>
           <a:prstGeom xmlns:a="http://schemas.openxmlformats.org/drawingml/2006/main" prst="rect">
@@ -4485,8 +4509,8 @@
         </p:nvSpPr>
         <p:spPr>
           <a:xfrm xmlns:a="http://schemas.openxmlformats.org/drawingml/2006/main">
-            <a:off x="19907250" y="21955125"/>
-            <a:ext cx="8763000" cy="4953000"/>
+            <a:off x="19907250" y="22860000"/>
+            <a:ext cx="8763000" cy="5286375"/>
           </a:xfrm>
           <a:prstGeom xmlns:a="http://schemas.openxmlformats.org/drawingml/2006/main" prst="rect">
             <a:avLst/>
@@ -4554,7 +4578,7 @@
                 <a:ea typeface="Aptos"/>
                 <a:cs typeface="Aptos"/>
               </a:rPr>
-              <a:t>Run ablations for common vs harmonic features and with/without edge features; report gains only once measured.</a:t>
+              <a:t>Run ablations for common vs harmonic features and with/without event features; report gains only once measured.</a:t>
             </a:r>
           </a:p>
           <a:p xmlns:a="http://schemas.openxmlformats.org/drawingml/2006/main">
@@ -4573,7 +4597,7 @@
                 <a:ea typeface="Aptos"/>
                 <a:cs typeface="Aptos"/>
               </a:rPr>
-              <a:t>Harmonic phases are synthetic-only because the PAC4200 does not expose them over Modbus.</a:t>
+              <a:t>Harmonic phases are synthetic-only because the PAC4200 does not expose them over Modbus; transferable deployment models must avoid synthetic-only phase inputs.</a:t>
             </a:r>
           </a:p>
           <a:p xmlns:a="http://schemas.openxmlformats.org/drawingml/2006/main">
@@ -4592,7 +4616,26 @@
                 <a:ea typeface="Aptos"/>
                 <a:cs typeface="Aptos"/>
               </a:rPr>
-              <a:t>Use CNN/LSTM or seq2point for long appliance cycles; validate true simultaneous multi-device recordings beyond semi-synthetic measured mixes.</a:t>
+              <a:t>Use CNN/LSTM or seq2point for long appliance cycles such as washing machines.</a:t>
+            </a:r>
+          </a:p>
+          <a:p xmlns:a="http://schemas.openxmlformats.org/drawingml/2006/main">
+            <a:pPr>
+              <a:spcAft>
+                <a:spcPts val="0"/>
+              </a:spcAft>
+              <a:buNone/>
+            </a:pPr>
+            <a:r>
+              <a:rPr sz="2475" b="0">
+                <a:solidFill>
+                  <a:srgbClr val="000000"/>
+                </a:solidFill>
+                <a:latin typeface="Aptos"/>
+                <a:ea typeface="Aptos"/>
+                <a:cs typeface="Aptos"/>
+              </a:rPr>
+              <a:t>Validate real simultaneous multi-device physics, because measured training mixes currently loop isolated recordings with random schedules.</a:t>
             </a:r>
           </a:p>
         </p:txBody>
@@ -4613,7 +4656,7 @@
         </p:nvSpPr>
         <p:spPr>
           <a:xfrm xmlns:a="http://schemas.openxmlformats.org/drawingml/2006/main">
-            <a:off x="19907250" y="27527250"/>
+            <a:off x="19907250" y="29413200"/>
             <a:ext cx="8763000" cy="666750"/>
           </a:xfrm>
           <a:prstGeom xmlns:a="http://schemas.openxmlformats.org/drawingml/2006/main" prst="rect">
@@ -4656,13 +4699,13 @@
       </p:sp>
       <p:cxnSp>
         <p:nvCxnSpPr>
-          <p:cNvPr id="263" name=""/>
+          <p:cNvPr id="943" name=""/>
           <p:cNvCxnSpPr/>
           <p:nvPr/>
         </p:nvCxnSpPr>
         <p:spPr>
           <a:xfrm xmlns:a="http://schemas.openxmlformats.org/drawingml/2006/main">
-            <a:off x="19983450" y="28222575"/>
+            <a:off x="19983450" y="30108525"/>
             <a:ext cx="8620125" cy="0"/>
           </a:xfrm>
           <a:prstGeom xmlns:a="http://schemas.openxmlformats.org/drawingml/2006/main" prst="straightConnector1">
@@ -4692,8 +4735,8 @@
         </p:nvSpPr>
         <p:spPr>
           <a:xfrm xmlns:a="http://schemas.openxmlformats.org/drawingml/2006/main">
-            <a:off x="19907250" y="28651200"/>
-            <a:ext cx="8763000" cy="3857625"/>
+            <a:off x="19907250" y="30537150"/>
+            <a:ext cx="8763000" cy="4095750"/>
           </a:xfrm>
           <a:prstGeom xmlns:a="http://schemas.openxmlformats.org/drawingml/2006/main" prst="rect">
             <a:avLst/>
@@ -4723,7 +4766,7 @@
                 <a:ea typeface="Aptos"/>
                 <a:cs typeface="Aptos"/>
               </a:rPr>
-              <a:t>A 5 Hz industrial power meter is enough when its processed channels are fused deliberately. The core result is the pairing of a physics-aware aggregator with a deployable RF mix model: signed power, harmonics, phase information, edge events and residual honesty become one operator-facing workflow.</a:t>
+              <a:t>Technically, the project is not just a classifier. It is a data contract plus a deployable inference loop: HDF5 scenarios carry aggregate signals and ground truth, the aggregator preserves signed power and harmonic physics, the RF mix bundle turns 17 window features into ON/OFF and watts, and the live layer adds edge timing, residual honesty and retraining.</a:t>
             </a:r>
           </a:p>
         </p:txBody>
@@ -4744,7 +4787,7 @@
         </p:nvSpPr>
         <p:spPr>
           <a:xfrm xmlns:a="http://schemas.openxmlformats.org/drawingml/2006/main">
-            <a:off x="1428750" y="28575000"/>
+            <a:off x="1428750" y="31623000"/>
             <a:ext cx="8763000" cy="666750"/>
           </a:xfrm>
           <a:prstGeom xmlns:a="http://schemas.openxmlformats.org/drawingml/2006/main" prst="rect">
@@ -4801,8 +4844,8 @@
         </p:nvSpPr>
         <p:spPr>
           <a:xfrm xmlns:a="http://schemas.openxmlformats.org/drawingml/2006/main">
-            <a:off x="1428750" y="29289375"/>
-            <a:ext cx="8763000" cy="4953000"/>
+            <a:off x="1428750" y="32289750"/>
+            <a:ext cx="8763000" cy="4476750"/>
           </a:xfrm>
           <a:prstGeom xmlns:a="http://schemas.openxmlformats.org/drawingml/2006/main" prst="rect">
             <a:avLst/>
@@ -4837,7 +4880,7 @@
                 <a:ea typeface="Arial"/>
                 <a:cs typeface="Arial"/>
               </a:rPr>
-              <a:t>Scripts/PAC4200_reader/pac_reader.py: Modbus acquisition, dashboard, HDF5 recorder.</a:t>
+              <a:t>pac_reader.py: one persistent Modbus TCP connection, 5 Hz polling, session HDF5 writer and harmonic file-record acquisition.</a:t>
             </a:r>
           </a:p>
           <a:p xmlns:a="http://schemas.openxmlformats.org/drawingml/2006/main">
@@ -4861,7 +4904,7 @@
                 <a:ea typeface="Arial"/>
                 <a:cs typeface="Arial"/>
               </a:rPr>
-              <a:t>Scripts/Aggregator/mix_measured_scenarios.py: real recordings to labelled training mixes.</a:t>
+              <a:t>aggregator.py: phase allocation, signed P/Q summation, synthesized voltage/frequency, complex harmonic summation and ground-truth tensors.</a:t>
             </a:r>
           </a:p>
           <a:p xmlns:a="http://schemas.openxmlformats.org/drawingml/2006/main">
@@ -4885,7 +4928,7 @@
                 <a:ea typeface="Arial"/>
                 <a:cs typeface="Arial"/>
               </a:rPr>
-              <a:t>Scripts/MS2_Pipeline/nilm_pipeline.py: loaders, feature extraction and 17-feature AGG_FEATURES.</a:t>
+              <a:t>mix_measured_scenarios.py: turns isolated real device recordings into labelled multi-device measured scenarios.</a:t>
             </a:r>
           </a:p>
           <a:p xmlns:a="http://schemas.openxmlformats.org/drawingml/2006/main">
@@ -4909,7 +4952,7 @@
                 <a:ea typeface="Arial"/>
                 <a:cs typeface="Arial"/>
               </a:rPr>
-              <a:t>Scripts/MS2_Pipeline/train.py: RF/LGBM/MLP tasks; mix bundle stores features, devices and metrics.</a:t>
+              <a:t>nilm_pipeline.py: common loaders plus 17 append-only AGG_FEATURES; model bundles store their feature list for compatible inference.</a:t>
             </a:r>
           </a:p>
           <a:p xmlns:a="http://schemas.openxmlformats.org/drawingml/2006/main">
@@ -4933,7 +4976,7 @@
                 <a:ea typeface="Arial"/>
                 <a:cs typeface="Arial"/>
               </a:rPr>
-              <a:t>Scripts/MS2_Pipeline/live.py: live inference, edge claims, residual monitor and teach/retrain loop.</a:t>
+              <a:t>train.py/live.py: RF mix training, presence-gated power output, edge claims, residual monitor and teach/retrain hot reload.</a:t>
             </a:r>
           </a:p>
         </p:txBody>
@@ -4954,7 +4997,7 @@
         </p:nvSpPr>
         <p:spPr>
           <a:xfrm xmlns:a="http://schemas.openxmlformats.org/drawingml/2006/main">
-            <a:off x="10668000" y="31194375"/>
+            <a:off x="10668000" y="30575250"/>
             <a:ext cx="8763000" cy="666750"/>
           </a:xfrm>
           <a:prstGeom xmlns:a="http://schemas.openxmlformats.org/drawingml/2006/main" prst="rect">
@@ -5011,8 +5054,8 @@
         </p:nvSpPr>
         <p:spPr>
           <a:xfrm xmlns:a="http://schemas.openxmlformats.org/drawingml/2006/main">
-            <a:off x="10668000" y="31908750"/>
-            <a:ext cx="8763000" cy="3667125"/>
+            <a:off x="10668000" y="31261050"/>
+            <a:ext cx="8763000" cy="2857500"/>
           </a:xfrm>
           <a:prstGeom xmlns:a="http://schemas.openxmlformats.org/drawingml/2006/main" prst="rect">
             <a:avLst/>
@@ -5047,7 +5090,7 @@
                 <a:ea typeface="Arial"/>
                 <a:cs typeface="Arial"/>
               </a:rPr>
-              <a:t>Mix model: 1920 measured-scenario windows, 10 s windows, 5 W ON threshold and seven-device vocabulary.</a:t>
+              <a:t>Mix evaluation: 1920 measured-scenario windows, 10 s windows, 5 W ON threshold and seven-device vocabulary.</a:t>
             </a:r>
           </a:p>
           <a:p xmlns:a="http://schemas.openxmlformats.org/drawingml/2006/main">
@@ -5071,7 +5114,7 @@
                 <a:ea typeface="Arial"/>
                 <a:cs typeface="Arial"/>
               </a:rPr>
-              <a:t>Held-out F1 and MAE travel with the model bundle; the dashboard shows presence-gated watts.</a:t>
+              <a:t>Metrics: presence macro-F1 for ON/OFF; raw power MAE is tracked, but gated MAE is the deployed dashboard number (2.9 W).</a:t>
             </a:r>
           </a:p>
           <a:p xmlns:a="http://schemas.openxmlformats.org/drawingml/2006/main">
@@ -5095,7 +5138,7 @@
                 <a:ea typeface="Arial"/>
                 <a:cs typeface="Arial"/>
               </a:rPr>
-              <a:t>Identify score uses 171 active real-device windows and a stratified row split, so it is an optimistic within-session estimate.</a:t>
+              <a:t>Identify: 171 active real-device windows with common plus harmonic features; row split is useful but optimistic.</a:t>
             </a:r>
           </a:p>
           <a:p xmlns:a="http://schemas.openxmlformats.org/drawingml/2006/main">
@@ -5119,7 +5162,7 @@
                 <a:ea typeface="Arial"/>
                 <a:cs typeface="Arial"/>
               </a:rPr>
-              <a:t>Leakage-free grouped evaluation needs repeated recording sessions; semi-synthetic measured mixes preserve real signatures but only partially test simultaneous interactions.</a:t>
+              <a:t>Remaining risk: repeated sessions and true simultaneous recordings are needed for leakage-free validation.</a:t>
             </a:r>
           </a:p>
         </p:txBody>
@@ -5183,7 +5226,7 @@
       </p:sp>
       <p:cxnSp>
         <p:nvCxnSpPr>
-          <p:cNvPr id="270" name=""/>
+          <p:cNvPr id="950" name=""/>
           <p:cNvCxnSpPr/>
           <p:nvPr/>
         </p:nvCxnSpPr>
@@ -5220,7 +5263,7 @@
         <p:spPr>
           <a:xfrm xmlns:a="http://schemas.openxmlformats.org/drawingml/2006/main">
             <a:off x="1428750" y="38576250"/>
-            <a:ext cx="18383250" cy="1762125"/>
+            <a:ext cx="8763000" cy="2476500"/>
           </a:xfrm>
           <a:prstGeom xmlns:a="http://schemas.openxmlformats.org/drawingml/2006/main" prst="rect">
             <a:avLst/>
@@ -5250,7 +5293,7 @@
                 <a:ea typeface="Aptos"/>
                 <a:cs typeface="Aptos"/>
               </a:rPr>
-              <a:t>Hart (1992) on NILM; Reddy et al. (2020) and Papageorgiou et al. (2022) on feature fusion and harmonic NILM; Siemens SENTRON PAC4200 system manual; project paper and repository artifacts.</a:t>
+              <a:t>Sources: project paper; Docs/01_data_format.md; Docs/09_design_rationale.md; Docs/MS3 notes; aggregator.py, nilm_pipeline.py, train.py, live.py, pac_reader.py; Hart, Reddy, Papageorgiou, Siemens PAC4200 manual.</a:t>
             </a:r>
           </a:p>
         </p:txBody>
@@ -5271,7 +5314,7 @@
         </p:nvSpPr>
         <p:spPr>
           <a:xfrm xmlns:a="http://schemas.openxmlformats.org/drawingml/2006/main">
-            <a:off x="19907250" y="38576250"/>
+            <a:off x="19907250" y="39319200"/>
             <a:ext cx="8763000" cy="1381125"/>
           </a:xfrm>
           <a:prstGeom xmlns:a="http://schemas.openxmlformats.org/drawingml/2006/main" prst="rect">
@@ -5314,14 +5357,14 @@
       </p:sp>
       <p:pic>
         <p:nvPicPr>
-          <p:cNvPr id="273" name="Live test high-load dashboard screenshot"/>
+          <p:cNvPr id="953" name="Live test high-load dashboard screenshot"/>
           <p:cNvPicPr>
             <a:picLocks xmlns:a="http://schemas.openxmlformats.org/drawingml/2006/main" noChangeAspect="1"/>
           </p:cNvPicPr>
           <p:nvPr/>
         </p:nvPicPr>
         <p:blipFill>
-          <a:blip xmlns:r="http://schemas.openxmlformats.org/officeDocument/2006/relationships" xmlns:a="http://schemas.openxmlformats.org/drawingml/2006/main" r:embed="R894398f10361443d"/>
+          <a:blip xmlns:r="http://schemas.openxmlformats.org/officeDocument/2006/relationships" xmlns:a="http://schemas.openxmlformats.org/drawingml/2006/main" r:embed="Rc0b5312d1d414e76"/>
           <a:srcRect xmlns:a="http://schemas.openxmlformats.org/drawingml/2006/main" l="0" t="8300" r="0" b="8300"/>
           <a:stretch xmlns:a="http://schemas.openxmlformats.org/drawingml/2006/main">
             <a:fillRect l="0" t="0" r="0" b="0"/>
@@ -5329,7 +5372,7 @@
         </p:blipFill>
         <p:spPr>
           <a:xfrm xmlns:a="http://schemas.openxmlformats.org/drawingml/2006/main">
-            <a:off x="19907250" y="14906625"/>
+            <a:off x="19907250" y="15830550"/>
             <a:ext cx="8763000" cy="4953000"/>
           </a:xfrm>
           <a:prstGeom xmlns:a="http://schemas.openxmlformats.org/drawingml/2006/main" prst="rect">
